--- a/docs/präsentation/folien_paket_c.pptx
+++ b/docs/präsentation/folien_paket_c.pptx
@@ -647,7 +647,7 @@
           <a:lstStyle/>
           <a:p>
             <a:r>
-              <a:t>Ca. 75 Sekunden. Stark bedeutet strikt mehr als 1,7 mm pro Stunde. Das ist das 90. Perzentil positiver Stationsstunden, vor dem Halt-Join berechnet. Vergleich stark gegen alle übrigen Halte: 1,613 statt 1,393 Minuten. Mann-Whitney-U prüft Verteilungsunterschiede; ergänzend Mittelwertdifferenz. Rang-biserial r=0,070, p&lt;0,001: kleiner Zusammenhang. Die Grafik zeigt drei Wetterklassen, der Test vergleicht stark gegen trocken und mässig zusammen. H2: Bus +0,212 und Bahn +0,214 Minuten. Interaktion −0,0017 Minuten, 95%-KI [−0,0299; 0,0264], p=0,904. H2 wird nicht gestützt.</a:t>
+              <a:t>Ca. 75 Sekunden. Stark bedeutet strikt mehr als 1,7 mm pro Stunde. Das ist das 90. Perzentil positiver Stationsstunden, vor dem Halt-Join berechnet. Vergleich stark gegen alle übrigen Halte: 1,613 statt 1,393 Minuten. Mann-Whitney-U prüft Verteilungsunterschiede; ergänzend Mittelwertdifferenz. Rang-biserial r=0,070, p&lt;0,001: kleiner Zusammenhang. Die Grafik zeigt drei Wetterklassen, der Test vergleicht stark gegen trocken und mässig zusammen. H2: Bus +0,212 und Bahn +0,214 Minuten. Interaktion −0,0017 Minuten, 95%-KI [−0,0299; 0,0264], p=0,904. H2 wird absolut nicht gestützt. Relativ ist es eher umgekehrt: Der Anteil verspäteter Halte steigt bei der Bahn von 5,5 auf 8,0 % (+45 %), beim Bus von 13,4 auf 16,5 % (+23 %), und r ist bei der Bahn grösser (0,103 statt 0,063). Die Mittelwerte steigen abgestuft von trocken über mässig zu stark, das stützt H1 zusätzlich.</a:t>
             </a:r>
           </a:p>
         </p:txBody>
@@ -717,7 +717,7 @@
           <a:lstStyle/>
           <a:p>
             <a:r>
-              <a:t>Ca. 60 Sekunden. HVZ Montag bis Freitag, 6 bis 9 und 16 bis 19 Uhr lokal, gesetzliche kantonale Feiertage ausgenommen. Während der HVZ ist das allgemeine Verspätungsniveau höher. Das ist aber etwas anderes als die Verstärkung des Wettereffekts: HVZ +0,208 gegenüber NVZ +0,268 Minuten. OLS-Interaktion −0,0603 Minuten, 95%-KI [−0,0816; −0,0389], p&lt;0,001. Die Richtung ist umgekehrt, die Differenz etwa 3,6 Sekunden. Die Regression nutzt alle bereinigten Halte, ohne Stichprobe.</a:t>
+              <a:t>Ca. 60 Sekunden. HVZ Montag bis Freitag, 6 bis 9 und 16 bis 19 Uhr lokal, gesetzliche kantonale Feiertage ausgenommen. Während der HVZ ist das allgemeine Verspätungsniveau höher. Das ist aber etwas anderes als die Verstärkung des Wettereffekts: HVZ +0,208 gegenüber NVZ +0,268 Minuten. OLS-Interaktion −0,0603 Minuten, 95%-KI [−0,0816; −0,0389], p&lt;0,001. Die Richtung ist umgekehrt, die Differenz etwa 3,6 Sekunden. Die Regression nutzt alle bereinigten Halte, ohne Stichprobe. Relativ: Anteil verspäteter Halte HVZ 19,2 → 22,9 % (+20 %), NVZ 9,5 → 13,1 % (+38 %).</a:t>
             </a:r>
           </a:p>
         </p:txBody>
@@ -787,7 +787,7 @@
           <a:lstStyle/>
           <a:p>
             <a:r>
-              <a:t>Ca. 60 Sekunden. Insgesamt hängt starker Niederschlag in diesem Winterquartal mit etwas höheren Ankunftsverspätungen zusammen. Kein stärkerer Effekt beim Bus oder in der HVZ. Keine Kausalität: Baustellen, Störungen und Nachfrage sind nicht kontrolliert. Halte derselben Fahrt sind abhängig; klassische p-Werte und Konfidenzintervalle können zu optimistisch sein. Schnee ergänzend nur +0,029 Minuten, r=0,014. Je nach Station wird Schneedecke oder Niederschlag bei Frost beobachtet, kein einheitlicher Schneefall. Die bereinigten Halte und eine Stundenaggregation stehen für Teil 2 bereit.</a:t>
+              <a:t>Ca. 60 Sekunden. Insgesamt hängt starker Niederschlag in diesem Winterquartal mit etwas höheren Ankunftsverspätungen zusammen. Kein stärkerer Effekt beim Bus oder in der HVZ. Keine Kausalität: Baustellen, Störungen und Nachfrage sind nicht kontrolliert. Halte derselben Fahrt sind abhängig; klassische p-Werte und Konfidenzintervalle können zu optimistisch sein. Schnee ergänzend nur +0,029 Minuten, r=0,014. Je nach Station wird Schneedecke oder Niederschlag bei Frost beobachtet, kein einheitlicher Schneefall. Die 47 Haltestellen ohne geeignete Station liegen alle auf rund 1000 m oder höher, also dort, wo Schnee am wichtigsten wäre. Ausgefallene Fahrten können wetterbedingt sein; weil sie ausgeschlossen sind, wird der Effekt eher unterschätzt (Ausfallquote nach Wetter für Teil 2). Die bereinigten Halte und eine Stundenaggregation stehen für Teil 2 bereit.</a:t>
             </a:r>
           </a:p>
         </p:txBody>
@@ -3987,7 +3987,7 @@
               </a:defRPr>
             </a:pPr>
             <a:r>
-              <a:t>Gruppe 4 · Enis · Paket C · 26.10.2026 | Quellen: MeteoSchweiz (2026), SBB/SKI (2026), swisstopo (2026)</a:t>
+              <a:t>Gruppe 4 · Enis · Paket C · 27.10.2026 | Quellen: MeteoSchweiz (2026), SBB/SKI (2026), swisstopo (2026)</a:t>
             </a:r>
           </a:p>
         </p:txBody>
@@ -4432,7 +4432,7 @@
               </a:defRPr>
             </a:pPr>
             <a:r>
-              <a:t>Gruppe 4 · Enis · Paket C · 26.10.2026 | Quellen: MeteoSchweiz (2026), SBB/SKI (2026), swisstopo (2026)</a:t>
+              <a:t>Gruppe 4 · Enis · Paket C · 27.10.2026 | Quellen: MeteoSchweiz (2026), SBB/SKI (2026), swisstopo (2026)</a:t>
             </a:r>
           </a:p>
         </p:txBody>
@@ -4784,7 +4784,7 @@
               </a:defRPr>
             </a:pPr>
             <a:r>
-              <a:t>Gruppe 4 · Enis · Paket C · 26.10.2026 | Quellen: MeteoSchweiz (2026), SBB/SKI (2026), swisstopo (2026)</a:t>
+              <a:t>Gruppe 4 · Enis · Paket C · 27.10.2026 | Quellen: MeteoSchweiz (2026), SBB/SKI (2026), swisstopo (2026)</a:t>
             </a:r>
           </a:p>
         </p:txBody>
@@ -4917,7 +4917,7 @@
               <a:spcAft>
                 <a:spcPts val="1200"/>
               </a:spcAft>
-              <a:defRPr sz="2000" b="0">
+              <a:defRPr sz="1800" b="0">
                 <a:solidFill>
                   <a:srgbClr val="17364A"/>
                 </a:solidFill>
@@ -4925,7 +4925,7 @@
               </a:defRPr>
             </a:pPr>
             <a:r>
-              <a:t>Stark: &gt; 1.7 mm/h</a:t>
+              <a:t>Stark: &gt; 1,7 mm/h</a:t>
             </a:r>
           </a:p>
           <a:p>
@@ -4933,7 +4933,7 @@
               <a:spcAft>
                 <a:spcPts val="1200"/>
               </a:spcAft>
-              <a:defRPr sz="2000" b="0">
+              <a:defRPr sz="1800" b="0">
                 <a:solidFill>
                   <a:srgbClr val="17364A"/>
                 </a:solidFill>
@@ -4949,7 +4949,7 @@
               <a:spcAft>
                 <a:spcPts val="1200"/>
               </a:spcAft>
-              <a:defRPr sz="2000" b="0">
+              <a:defRPr sz="1800" b="0">
                 <a:solidFill>
                   <a:srgbClr val="17364A"/>
                 </a:solidFill>
@@ -4965,7 +4965,7 @@
               <a:spcAft>
                 <a:spcPts val="1200"/>
               </a:spcAft>
-              <a:defRPr sz="2000" b="0">
+              <a:defRPr sz="1800" b="0">
                 <a:solidFill>
                   <a:srgbClr val="17364A"/>
                 </a:solidFill>
@@ -4973,23 +4973,7 @@
               </a:defRPr>
             </a:pPr>
             <a:r>
-              <a:t>H2 nicht gestützt:</a:t>
-            </a:r>
-          </a:p>
-          <a:p>
-            <a:pPr>
-              <a:spcAft>
-                <a:spcPts val="1200"/>
-              </a:spcAft>
-              <a:defRPr sz="2000" b="0">
-                <a:solidFill>
-                  <a:srgbClr val="17364A"/>
-                </a:solidFill>
-                <a:latin typeface="Aptos"/>
-              </a:defRPr>
-            </a:pPr>
-            <a:r>
-              <a:t>Fast gleicher Wettereffekt bei Bus und Bahn</a:t>
+              <a:t>H2 nicht gestützt: absolut gleicher Effekt (+0,21 Min.), relativ bei der Bahn eher stärker</a:t>
             </a:r>
           </a:p>
         </p:txBody>
@@ -5028,7 +5012,7 @@
               </a:defRPr>
             </a:pPr>
             <a:r>
-              <a:t>H1-Test: stark gegen sonst. Grafik: trocken / mässig / stark.</a:t>
+              <a:t>Abgestuft trocken → mässig → stark: Bus 1,45 → 1,61 → 1,69 Min. · Bahn 0,83 → 1,04 → 1,07 Min. (H1-Test: stark gegen sonst)</a:t>
             </a:r>
           </a:p>
         </p:txBody>
@@ -5175,7 +5159,7 @@
               </a:defRPr>
             </a:pPr>
             <a:r>
-              <a:t>Gruppe 4 · Enis · Paket C · 26.10.2026 | Quellen: MeteoSchweiz (2026), SBB/SKI (2026), swisstopo (2026)</a:t>
+              <a:t>Gruppe 4 · Enis · Paket C · 27.10.2026 | Quellen: MeteoSchweiz (2026), SBB/SKI (2026), swisstopo (2026)</a:t>
             </a:r>
           </a:p>
         </p:txBody>
@@ -5277,7 +5261,7 @@
               </a:defRPr>
             </a:pPr>
             <a:r>
-              <a:t>Wettereffekt stark vs. sonst:</a:t>
+              <a:t>Wettereffekt stark vs, sonst:</a:t>
             </a:r>
           </a:p>
           <a:p>
@@ -5325,7 +5309,7 @@
               </a:defRPr>
             </a:pPr>
             <a:r>
-              <a:t>Interaktion: -0.060 Minuten</a:t>
+              <a:t>Interaktion: -0,060 Minuten</a:t>
             </a:r>
           </a:p>
           <a:p>
@@ -5527,7 +5511,7 @@
               </a:defRPr>
             </a:pPr>
             <a:r>
-              <a:t>Gruppe 4 · Enis · Paket C · 26.10.2026 | Quellen: MeteoSchweiz (2026), SBB/SKI (2026), swisstopo (2026)</a:t>
+              <a:t>Gruppe 4 · Enis · Paket C · 27.10.2026 | Quellen: MeteoSchweiz (2026), SBB/SKI (2026), swisstopo (2026)</a:t>
             </a:r>
           </a:p>
         </p:txBody>
@@ -5597,7 +5581,7 @@
               <a:spcAft>
                 <a:spcPts val="1200"/>
               </a:spcAft>
-              <a:defRPr sz="2400" b="0">
+              <a:defRPr sz="2100" b="0">
                 <a:solidFill>
                   <a:srgbClr val="17364A"/>
                 </a:solidFill>
@@ -5613,7 +5597,7 @@
               <a:spcAft>
                 <a:spcPts val="1200"/>
               </a:spcAft>
-              <a:defRPr sz="2400" b="0">
+              <a:defRPr sz="2100" b="0">
                 <a:solidFill>
                   <a:srgbClr val="17364A"/>
                 </a:solidFill>
@@ -5629,7 +5613,7 @@
               <a:spcAft>
                 <a:spcPts val="1200"/>
               </a:spcAft>
-              <a:defRPr sz="2400" b="0">
+              <a:defRPr sz="2100" b="0">
                 <a:solidFill>
                   <a:srgbClr val="17364A"/>
                 </a:solidFill>
@@ -5638,6 +5622,22 @@
             </a:pPr>
             <a:r>
               <a:t>Halte derselben Fahrt sind nicht unabhängig</a:t>
+            </a:r>
+          </a:p>
+          <a:p>
+            <a:pPr>
+              <a:spcAft>
+                <a:spcPts val="1200"/>
+              </a:spcAft>
+              <a:defRPr sz="2100" b="0">
+                <a:solidFill>
+                  <a:srgbClr val="17364A"/>
+                </a:solidFill>
+                <a:latin typeface="Aptos"/>
+              </a:defRPr>
+            </a:pPr>
+            <a:r>
+              <a:t>Ausfälle ausgeschlossen: Effekt eher unterschätzt</a:t>
             </a:r>
           </a:p>
         </p:txBody>
@@ -5668,7 +5668,7 @@
               <a:spcAft>
                 <a:spcPts val="1200"/>
               </a:spcAft>
-              <a:defRPr sz="2400" b="0">
+              <a:defRPr sz="2100" b="0">
                 <a:solidFill>
                   <a:srgbClr val="17364A"/>
                 </a:solidFill>
@@ -5684,7 +5684,7 @@
               <a:spcAft>
                 <a:spcPts val="1200"/>
               </a:spcAft>
-              <a:defRPr sz="2400" b="0">
+              <a:defRPr sz="2100" b="0">
                 <a:solidFill>
                   <a:srgbClr val="17364A"/>
                 </a:solidFill>
@@ -5700,7 +5700,7 @@
               <a:spcAft>
                 <a:spcPts val="1200"/>
               </a:spcAft>
-              <a:defRPr sz="2400" b="0">
+              <a:defRPr sz="2100" b="0">
                 <a:solidFill>
                   <a:srgbClr val="17364A"/>
                 </a:solidFill>
@@ -5709,6 +5709,22 @@
             </a:pPr>
             <a:r>
               <a:t>Schneedecke und Frostniederschlag sind keine einheitliche Schneefallmessung</a:t>
+            </a:r>
+          </a:p>
+          <a:p>
+            <a:pPr>
+              <a:spcAft>
+                <a:spcPts val="1200"/>
+              </a:spcAft>
+              <a:defRPr sz="2100" b="0">
+                <a:solidFill>
+                  <a:srgbClr val="17364A"/>
+                </a:solidFill>
+                <a:latin typeface="Aptos"/>
+              </a:defRPr>
+            </a:pPr>
+            <a:r>
+              <a:t>47 Haltestellen ab ca. 1000 m ohne Station, gerade dort zählt Schnee</a:t>
             </a:r>
           </a:p>
         </p:txBody>
@@ -5910,7 +5926,7 @@
               </a:defRPr>
             </a:pPr>
             <a:r>
-              <a:t>Gruppe 4 · Enis · Paket C · 26.10.2026 | Quellen: MeteoSchweiz (2026), SBB/SKI (2026), swisstopo (2026)</a:t>
+              <a:t>Gruppe 4 · Enis · Paket C · 27.10.2026 | Quellen: MeteoSchweiz (2026), SBB/SKI (2026), swisstopo (2026)</a:t>
             </a:r>
           </a:p>
         </p:txBody>

--- a/docs/präsentation/folien_paket_c.pptx
+++ b/docs/präsentation/folien_paket_c.pptx
@@ -3987,7 +3987,7 @@
               </a:defRPr>
             </a:pPr>
             <a:r>
-              <a:t>Gruppe 4 · Enis · Paket C · 27.10.2026 | Quellen: MeteoSchweiz (2026), SBB/SKI (2026), swisstopo (2026)</a:t>
+              <a:t>Gruppe 4 · Enis · Paket C | Quellen: MeteoSchweiz (2026), SBB/SKI (2026), swisstopo (2026)</a:t>
             </a:r>
           </a:p>
         </p:txBody>
@@ -4432,7 +4432,7 @@
               </a:defRPr>
             </a:pPr>
             <a:r>
-              <a:t>Gruppe 4 · Enis · Paket C · 27.10.2026 | Quellen: MeteoSchweiz (2026), SBB/SKI (2026), swisstopo (2026)</a:t>
+              <a:t>Gruppe 4 · Enis · Paket C | Quellen: MeteoSchweiz (2026), SBB/SKI (2026), swisstopo (2026)</a:t>
             </a:r>
           </a:p>
         </p:txBody>
@@ -4784,7 +4784,7 @@
               </a:defRPr>
             </a:pPr>
             <a:r>
-              <a:t>Gruppe 4 · Enis · Paket C · 27.10.2026 | Quellen: MeteoSchweiz (2026), SBB/SKI (2026), swisstopo (2026)</a:t>
+              <a:t>Gruppe 4 · Enis · Paket C | Quellen: MeteoSchweiz (2026), SBB/SKI (2026), swisstopo (2026)</a:t>
             </a:r>
           </a:p>
         </p:txBody>
@@ -5159,7 +5159,7 @@
               </a:defRPr>
             </a:pPr>
             <a:r>
-              <a:t>Gruppe 4 · Enis · Paket C · 27.10.2026 | Quellen: MeteoSchweiz (2026), SBB/SKI (2026), swisstopo (2026)</a:t>
+              <a:t>Gruppe 4 · Enis · Paket C | Quellen: MeteoSchweiz (2026), SBB/SKI (2026), swisstopo (2026)</a:t>
             </a:r>
           </a:p>
         </p:txBody>
@@ -5511,7 +5511,7 @@
               </a:defRPr>
             </a:pPr>
             <a:r>
-              <a:t>Gruppe 4 · Enis · Paket C · 27.10.2026 | Quellen: MeteoSchweiz (2026), SBB/SKI (2026), swisstopo (2026)</a:t>
+              <a:t>Gruppe 4 · Enis · Paket C | Quellen: MeteoSchweiz (2026), SBB/SKI (2026), swisstopo (2026)</a:t>
             </a:r>
           </a:p>
         </p:txBody>
@@ -5926,7 +5926,7 @@
               </a:defRPr>
             </a:pPr>
             <a:r>
-              <a:t>Gruppe 4 · Enis · Paket C · 27.10.2026 | Quellen: MeteoSchweiz (2026), SBB/SKI (2026), swisstopo (2026)</a:t>
+              <a:t>Gruppe 4 · Enis · Paket C | Quellen: MeteoSchweiz (2026), SBB/SKI (2026), swisstopo (2026)</a:t>
             </a:r>
           </a:p>
         </p:txBody>
